--- a/examples/relatorio-financeiro.pptx
+++ b/examples/relatorio-financeiro.pptx
@@ -4651,7 +4651,7 @@
           <a:p>
             <a:pPr algn="l"/>
             <a:r>
-              <a:rPr sz="4000" b="1" i="0">
+              <a:rPr sz="2700" b="1" i="0">
                 <a:solidFill>
                   <a:srgbClr val="2B2B2B"/>
                 </a:solidFill>
@@ -4844,7 +4844,7 @@
           <a:p>
             <a:pPr algn="l"/>
             <a:r>
-              <a:rPr sz="4000" b="1" i="0">
+              <a:rPr sz="3000" b="1" i="0">
                 <a:solidFill>
                   <a:srgbClr val="2B2B2B"/>
                 </a:solidFill>
@@ -5230,7 +5230,7 @@
           <a:p>
             <a:pPr algn="l"/>
             <a:r>
-              <a:rPr sz="4000" b="1" i="0">
+              <a:rPr sz="2700" b="1" i="0">
                 <a:solidFill>
                   <a:srgbClr val="2B2B2B"/>
                 </a:solidFill>

--- a/examples/relatorio-financeiro.pptx
+++ b/examples/relatorio-financeiro.pptx
@@ -3784,8 +3784,8 @@
         </p:nvSpPr>
         <p:spPr>
           <a:xfrm>
-            <a:off x="731520" y="2194560"/>
-            <a:ext cx="10698480" cy="1463040"/>
+            <a:off x="731520" y="1920240"/>
+            <a:ext cx="10698480" cy="1737360"/>
           </a:xfrm>
           <a:prstGeom prst="rect">
             <a:avLst/>
@@ -3842,6 +3842,41 @@
                 <a:latin typeface="Arial"/>
               </a:rPr>
               <a:t>Diretoria Financeira - base gerencial</a:t>
+            </a:r>
+          </a:p>
+        </p:txBody>
+      </p:sp>
+      <p:sp>
+        <p:nvSpPr>
+          <p:cNvPr id="5" name="TextBox 4"/>
+          <p:cNvSpPr txBox="1"/>
+          <p:nvPr/>
+        </p:nvSpPr>
+        <p:spPr>
+          <a:xfrm>
+            <a:off x="731520" y="5669280"/>
+            <a:ext cx="10698480" cy="457200"/>
+          </a:xfrm>
+          <a:prstGeom prst="rect">
+            <a:avLst/>
+          </a:prstGeom>
+          <a:noFill/>
+        </p:spPr>
+        <p:txBody>
+          <a:bodyPr wrap="square" anchor="t" lIns="45720" rIns="45720" tIns="27432" bIns="27432">
+            <a:spAutoFit/>
+          </a:bodyPr>
+          <a:lstStyle/>
+          <a:p>
+            <a:pPr algn="l"/>
+            <a:r>
+              <a:rPr sz="1300" b="0" i="0">
+                <a:solidFill>
+                  <a:srgbClr val="BFC9D4"/>
+                </a:solidFill>
+                <a:latin typeface="Arial"/>
+              </a:rPr>
+              <a:t>2026-07-15</a:t>
             </a:r>
           </a:p>
         </p:txBody>
@@ -3905,6 +3940,41 @@
         </p:nvSpPr>
         <p:spPr>
           <a:xfrm>
+            <a:off x="7772400" y="91440"/>
+            <a:ext cx="3959352" cy="228600"/>
+          </a:xfrm>
+          <a:prstGeom prst="rect">
+            <a:avLst/>
+          </a:prstGeom>
+          <a:noFill/>
+        </p:spPr>
+        <p:txBody>
+          <a:bodyPr wrap="square" anchor="ctr" lIns="45720" rIns="45720" tIns="27432" bIns="27432">
+            <a:spAutoFit/>
+          </a:bodyPr>
+          <a:lstStyle/>
+          <a:p>
+            <a:pPr algn="r"/>
+            <a:r>
+              <a:rPr sz="900" b="0" i="0">
+                <a:solidFill>
+                  <a:srgbClr val="7F7F7F"/>
+                </a:solidFill>
+                <a:latin typeface="Arial"/>
+              </a:rPr>
+              <a:t>2026-07-15</a:t>
+            </a:r>
+          </a:p>
+        </p:txBody>
+      </p:sp>
+      <p:sp>
+        <p:nvSpPr>
+          <p:cNvPr id="4" name="TextBox 3"/>
+          <p:cNvSpPr txBox="1"/>
+          <p:nvPr/>
+        </p:nvSpPr>
+        <p:spPr>
+          <a:xfrm>
             <a:off x="10817352" y="6217920"/>
             <a:ext cx="914400" cy="365760"/>
           </a:xfrm>
@@ -3934,7 +4004,7 @@
       </p:sp>
       <p:sp>
         <p:nvSpPr>
-          <p:cNvPr id="4" name="Rectangle 3"/>
+          <p:cNvPr id="5" name="Rectangle 4"/>
           <p:cNvSpPr/>
           <p:nvPr/>
         </p:nvSpPr>
@@ -3978,7 +4048,7 @@
       </p:sp>
       <p:sp>
         <p:nvSpPr>
-          <p:cNvPr id="5" name="Rectangle 4"/>
+          <p:cNvPr id="6" name="Rectangle 5"/>
           <p:cNvSpPr/>
           <p:nvPr/>
         </p:nvSpPr>
@@ -4022,7 +4092,7 @@
       </p:sp>
       <p:sp>
         <p:nvSpPr>
-          <p:cNvPr id="6" name="TextBox 5"/>
+          <p:cNvPr id="7" name="TextBox 6"/>
           <p:cNvSpPr txBox="1"/>
           <p:nvPr/>
         </p:nvSpPr>
@@ -4057,7 +4127,7 @@
       </p:sp>
       <p:sp>
         <p:nvSpPr>
-          <p:cNvPr id="7" name="Oval 6"/>
+          <p:cNvPr id="8" name="Oval 7"/>
           <p:cNvSpPr/>
           <p:nvPr/>
         </p:nvSpPr>
@@ -4110,7 +4180,7 @@
       </p:sp>
       <p:sp>
         <p:nvSpPr>
-          <p:cNvPr id="8" name="TextBox 7"/>
+          <p:cNvPr id="9" name="TextBox 8"/>
           <p:cNvSpPr txBox="1"/>
           <p:nvPr/>
         </p:nvSpPr>
@@ -4145,7 +4215,7 @@
       </p:sp>
       <p:sp>
         <p:nvSpPr>
-          <p:cNvPr id="9" name="Oval 8"/>
+          <p:cNvPr id="10" name="Oval 9"/>
           <p:cNvSpPr/>
           <p:nvPr/>
         </p:nvSpPr>
@@ -4198,7 +4268,7 @@
       </p:sp>
       <p:sp>
         <p:nvSpPr>
-          <p:cNvPr id="10" name="TextBox 9"/>
+          <p:cNvPr id="11" name="TextBox 10"/>
           <p:cNvSpPr txBox="1"/>
           <p:nvPr/>
         </p:nvSpPr>
@@ -4233,7 +4303,7 @@
       </p:sp>
       <p:sp>
         <p:nvSpPr>
-          <p:cNvPr id="11" name="Oval 10"/>
+          <p:cNvPr id="12" name="Oval 11"/>
           <p:cNvSpPr/>
           <p:nvPr/>
         </p:nvSpPr>
@@ -4286,7 +4356,7 @@
       </p:sp>
       <p:sp>
         <p:nvSpPr>
-          <p:cNvPr id="12" name="TextBox 11"/>
+          <p:cNvPr id="13" name="TextBox 12"/>
           <p:cNvSpPr txBox="1"/>
           <p:nvPr/>
         </p:nvSpPr>
@@ -4321,7 +4391,7 @@
       </p:sp>
       <p:sp>
         <p:nvSpPr>
-          <p:cNvPr id="13" name="Rectangle 12"/>
+          <p:cNvPr id="14" name="Rectangle 13"/>
           <p:cNvSpPr/>
           <p:nvPr/>
         </p:nvSpPr>
@@ -4367,7 +4437,7 @@
       </p:sp>
       <p:sp>
         <p:nvSpPr>
-          <p:cNvPr id="14" name="TextBox 13"/>
+          <p:cNvPr id="15" name="TextBox 14"/>
           <p:cNvSpPr txBox="1"/>
           <p:nvPr/>
         </p:nvSpPr>
@@ -4477,6 +4547,41 @@
         </p:nvSpPr>
         <p:spPr>
           <a:xfrm>
+            <a:off x="7772400" y="91440"/>
+            <a:ext cx="3959352" cy="228600"/>
+          </a:xfrm>
+          <a:prstGeom prst="rect">
+            <a:avLst/>
+          </a:prstGeom>
+          <a:noFill/>
+        </p:spPr>
+        <p:txBody>
+          <a:bodyPr wrap="square" anchor="ctr" lIns="45720" rIns="45720" tIns="27432" bIns="27432">
+            <a:spAutoFit/>
+          </a:bodyPr>
+          <a:lstStyle/>
+          <a:p>
+            <a:pPr algn="r"/>
+            <a:r>
+              <a:rPr sz="900" b="0" i="0">
+                <a:solidFill>
+                  <a:srgbClr val="7F7F7F"/>
+                </a:solidFill>
+                <a:latin typeface="Arial"/>
+              </a:rPr>
+              <a:t>2026-07-15</a:t>
+            </a:r>
+          </a:p>
+        </p:txBody>
+      </p:sp>
+      <p:sp>
+        <p:nvSpPr>
+          <p:cNvPr id="4" name="TextBox 3"/>
+          <p:cNvSpPr txBox="1"/>
+          <p:nvPr/>
+        </p:nvSpPr>
+        <p:spPr>
+          <a:xfrm>
             <a:off x="10817352" y="6217920"/>
             <a:ext cx="914400" cy="365760"/>
           </a:xfrm>
@@ -4506,7 +4611,7 @@
       </p:sp>
       <p:sp>
         <p:nvSpPr>
-          <p:cNvPr id="4" name="Rectangle 3"/>
+          <p:cNvPr id="5" name="Rectangle 4"/>
           <p:cNvSpPr/>
           <p:nvPr/>
         </p:nvSpPr>
@@ -4550,7 +4655,7 @@
       </p:sp>
       <p:sp>
         <p:nvSpPr>
-          <p:cNvPr id="5" name="Rectangle 4"/>
+          <p:cNvPr id="6" name="Rectangle 5"/>
           <p:cNvSpPr/>
           <p:nvPr/>
         </p:nvSpPr>
@@ -4594,7 +4699,7 @@
       </p:sp>
       <p:sp>
         <p:nvSpPr>
-          <p:cNvPr id="6" name="TextBox 5"/>
+          <p:cNvPr id="7" name="TextBox 6"/>
           <p:cNvSpPr txBox="1"/>
           <p:nvPr/>
         </p:nvSpPr>
@@ -4629,7 +4734,7 @@
       </p:sp>
       <p:sp>
         <p:nvSpPr>
-          <p:cNvPr id="7" name="TextBox 6"/>
+          <p:cNvPr id="8" name="TextBox 7"/>
           <p:cNvSpPr txBox="1"/>
           <p:nvPr/>
         </p:nvSpPr>
@@ -4664,14 +4769,14 @@
       </p:sp>
       <p:sp>
         <p:nvSpPr>
-          <p:cNvPr id="8" name="TextBox 7"/>
+          <p:cNvPr id="9" name="TextBox 8"/>
           <p:cNvSpPr txBox="1"/>
           <p:nvPr/>
         </p:nvSpPr>
         <p:spPr>
           <a:xfrm>
-            <a:off x="594360" y="3337560"/>
-            <a:ext cx="2338578" cy="457200"/>
+            <a:off x="594360" y="3154680"/>
+            <a:ext cx="2338578" cy="411480"/>
           </a:xfrm>
           <a:prstGeom prst="rect">
             <a:avLst/>
@@ -4699,7 +4804,7 @@
       </p:sp>
       <p:sp>
         <p:nvSpPr>
-          <p:cNvPr id="9" name="Rectangle 8"/>
+          <p:cNvPr id="10" name="Rectangle 9"/>
           <p:cNvSpPr/>
           <p:nvPr/>
         </p:nvSpPr>
@@ -4743,7 +4848,7 @@
       </p:sp>
       <p:sp>
         <p:nvSpPr>
-          <p:cNvPr id="10" name="Rectangle 9"/>
+          <p:cNvPr id="11" name="Rectangle 10"/>
           <p:cNvSpPr/>
           <p:nvPr/>
         </p:nvSpPr>
@@ -4787,7 +4892,7 @@
       </p:sp>
       <p:sp>
         <p:nvSpPr>
-          <p:cNvPr id="11" name="TextBox 10"/>
+          <p:cNvPr id="12" name="TextBox 11"/>
           <p:cNvSpPr txBox="1"/>
           <p:nvPr/>
         </p:nvSpPr>
@@ -4822,7 +4927,7 @@
       </p:sp>
       <p:sp>
         <p:nvSpPr>
-          <p:cNvPr id="12" name="TextBox 11"/>
+          <p:cNvPr id="13" name="TextBox 12"/>
           <p:cNvSpPr txBox="1"/>
           <p:nvPr/>
         </p:nvSpPr>
@@ -4857,14 +4962,14 @@
       </p:sp>
       <p:sp>
         <p:nvSpPr>
-          <p:cNvPr id="13" name="TextBox 12"/>
+          <p:cNvPr id="14" name="TextBox 13"/>
           <p:cNvSpPr txBox="1"/>
           <p:nvPr/>
         </p:nvSpPr>
         <p:spPr>
           <a:xfrm>
-            <a:off x="3481577" y="3337560"/>
-            <a:ext cx="2338578" cy="457200"/>
+            <a:off x="3481577" y="3154680"/>
+            <a:ext cx="2338578" cy="411480"/>
           </a:xfrm>
           <a:prstGeom prst="rect">
             <a:avLst/>
@@ -4892,7 +4997,7 @@
       </p:sp>
       <p:sp>
         <p:nvSpPr>
-          <p:cNvPr id="14" name="Rectangle 13"/>
+          <p:cNvPr id="15" name="Rectangle 14"/>
           <p:cNvSpPr/>
           <p:nvPr/>
         </p:nvSpPr>
@@ -4936,7 +5041,7 @@
       </p:sp>
       <p:sp>
         <p:nvSpPr>
-          <p:cNvPr id="15" name="Rectangle 14"/>
+          <p:cNvPr id="16" name="Rectangle 15"/>
           <p:cNvSpPr/>
           <p:nvPr/>
         </p:nvSpPr>
@@ -4980,7 +5085,7 @@
       </p:sp>
       <p:sp>
         <p:nvSpPr>
-          <p:cNvPr id="16" name="TextBox 15"/>
+          <p:cNvPr id="17" name="TextBox 16"/>
           <p:cNvSpPr txBox="1"/>
           <p:nvPr/>
         </p:nvSpPr>
@@ -5015,7 +5120,7 @@
       </p:sp>
       <p:sp>
         <p:nvSpPr>
-          <p:cNvPr id="17" name="TextBox 16"/>
+          <p:cNvPr id="18" name="TextBox 17"/>
           <p:cNvSpPr txBox="1"/>
           <p:nvPr/>
         </p:nvSpPr>
@@ -5050,14 +5155,14 @@
       </p:sp>
       <p:sp>
         <p:nvSpPr>
-          <p:cNvPr id="18" name="TextBox 17"/>
+          <p:cNvPr id="19" name="TextBox 18"/>
           <p:cNvSpPr txBox="1"/>
           <p:nvPr/>
         </p:nvSpPr>
         <p:spPr>
           <a:xfrm>
-            <a:off x="6368796" y="3337560"/>
-            <a:ext cx="2338578" cy="457200"/>
+            <a:off x="6368796" y="3154680"/>
+            <a:ext cx="2338578" cy="411480"/>
           </a:xfrm>
           <a:prstGeom prst="rect">
             <a:avLst/>
@@ -5085,7 +5190,7 @@
       </p:sp>
       <p:sp>
         <p:nvSpPr>
-          <p:cNvPr id="19" name="Rectangle 18"/>
+          <p:cNvPr id="20" name="Rectangle 19"/>
           <p:cNvSpPr/>
           <p:nvPr/>
         </p:nvSpPr>
@@ -5129,7 +5234,7 @@
       </p:sp>
       <p:sp>
         <p:nvSpPr>
-          <p:cNvPr id="20" name="Rectangle 19"/>
+          <p:cNvPr id="21" name="Rectangle 20"/>
           <p:cNvSpPr/>
           <p:nvPr/>
         </p:nvSpPr>
@@ -5173,7 +5278,7 @@
       </p:sp>
       <p:sp>
         <p:nvSpPr>
-          <p:cNvPr id="21" name="TextBox 20"/>
+          <p:cNvPr id="22" name="TextBox 21"/>
           <p:cNvSpPr txBox="1"/>
           <p:nvPr/>
         </p:nvSpPr>
@@ -5208,7 +5313,7 @@
       </p:sp>
       <p:sp>
         <p:nvSpPr>
-          <p:cNvPr id="22" name="TextBox 21"/>
+          <p:cNvPr id="23" name="TextBox 22"/>
           <p:cNvSpPr txBox="1"/>
           <p:nvPr/>
         </p:nvSpPr>
@@ -5243,14 +5348,14 @@
       </p:sp>
       <p:sp>
         <p:nvSpPr>
-          <p:cNvPr id="23" name="TextBox 22"/>
+          <p:cNvPr id="24" name="TextBox 23"/>
           <p:cNvSpPr txBox="1"/>
           <p:nvPr/>
         </p:nvSpPr>
         <p:spPr>
           <a:xfrm>
-            <a:off x="9256014" y="3337560"/>
-            <a:ext cx="2338578" cy="457200"/>
+            <a:off x="9256014" y="3154680"/>
+            <a:ext cx="2338578" cy="411480"/>
           </a:xfrm>
           <a:prstGeom prst="rect">
             <a:avLst/>
@@ -5335,8 +5440,43 @@
         </p:nvSpPr>
         <p:spPr>
           <a:xfrm>
+            <a:off x="7772400" y="91440"/>
+            <a:ext cx="3959352" cy="228600"/>
+          </a:xfrm>
+          <a:prstGeom prst="rect">
+            <a:avLst/>
+          </a:prstGeom>
+          <a:noFill/>
+        </p:spPr>
+        <p:txBody>
+          <a:bodyPr wrap="square" anchor="ctr" lIns="45720" rIns="45720" tIns="27432" bIns="27432">
+            <a:spAutoFit/>
+          </a:bodyPr>
+          <a:lstStyle/>
+          <a:p>
+            <a:pPr algn="r"/>
+            <a:r>
+              <a:rPr sz="900" b="0" i="0">
+                <a:solidFill>
+                  <a:srgbClr val="7F7F7F"/>
+                </a:solidFill>
+                <a:latin typeface="Arial"/>
+              </a:rPr>
+              <a:t>2026-07-15</a:t>
+            </a:r>
+          </a:p>
+        </p:txBody>
+      </p:sp>
+      <p:sp>
+        <p:nvSpPr>
+          <p:cNvPr id="4" name="TextBox 3"/>
+          <p:cNvSpPr txBox="1"/>
+          <p:nvPr/>
+        </p:nvSpPr>
+        <p:spPr>
+          <a:xfrm>
             <a:off x="457200" y="6217920"/>
-            <a:ext cx="10360152" cy="365760"/>
+            <a:ext cx="8531352" cy="365760"/>
           </a:xfrm>
           <a:prstGeom prst="rect">
             <a:avLst/>
@@ -5364,7 +5504,7 @@
       </p:sp>
       <p:sp>
         <p:nvSpPr>
-          <p:cNvPr id="4" name="TextBox 3"/>
+          <p:cNvPr id="5" name="TextBox 4"/>
           <p:cNvSpPr txBox="1"/>
           <p:nvPr/>
         </p:nvSpPr>
@@ -5399,7 +5539,7 @@
       </p:sp>
       <p:graphicFrame>
         <p:nvGraphicFramePr>
-          <p:cNvPr id="5" name="Chart 4"/>
+          <p:cNvPr id="6" name="Chart 5"/>
           <p:cNvGraphicFramePr>
             <a:graphicFrameLocks noGrp="1"/>
           </p:cNvGraphicFramePr>
@@ -5474,6 +5614,41 @@
         </p:nvSpPr>
         <p:spPr>
           <a:xfrm>
+            <a:off x="7772400" y="91440"/>
+            <a:ext cx="3959352" cy="228600"/>
+          </a:xfrm>
+          <a:prstGeom prst="rect">
+            <a:avLst/>
+          </a:prstGeom>
+          <a:noFill/>
+        </p:spPr>
+        <p:txBody>
+          <a:bodyPr wrap="square" anchor="ctr" lIns="45720" rIns="45720" tIns="27432" bIns="27432">
+            <a:spAutoFit/>
+          </a:bodyPr>
+          <a:lstStyle/>
+          <a:p>
+            <a:pPr algn="r"/>
+            <a:r>
+              <a:rPr sz="900" b="0" i="0">
+                <a:solidFill>
+                  <a:srgbClr val="7F7F7F"/>
+                </a:solidFill>
+                <a:latin typeface="Arial"/>
+              </a:rPr>
+              <a:t>2026-07-15</a:t>
+            </a:r>
+          </a:p>
+        </p:txBody>
+      </p:sp>
+      <p:sp>
+        <p:nvSpPr>
+          <p:cNvPr id="4" name="TextBox 3"/>
+          <p:cNvSpPr txBox="1"/>
+          <p:nvPr/>
+        </p:nvSpPr>
+        <p:spPr>
+          <a:xfrm>
             <a:off x="10817352" y="6217920"/>
             <a:ext cx="914400" cy="365760"/>
           </a:xfrm>
@@ -5503,7 +5678,7 @@
       </p:sp>
       <p:graphicFrame>
         <p:nvGraphicFramePr>
-          <p:cNvPr id="4" name="Table 3"/>
+          <p:cNvPr id="5" name="Table 4"/>
           <p:cNvGraphicFramePr>
             <a:graphicFrameLocks noGrp="1"/>
           </p:cNvGraphicFramePr>
@@ -6291,6 +6466,41 @@
         </p:nvSpPr>
         <p:spPr>
           <a:xfrm>
+            <a:off x="7772400" y="91440"/>
+            <a:ext cx="3959352" cy="228600"/>
+          </a:xfrm>
+          <a:prstGeom prst="rect">
+            <a:avLst/>
+          </a:prstGeom>
+          <a:noFill/>
+        </p:spPr>
+        <p:txBody>
+          <a:bodyPr wrap="square" anchor="ctr" lIns="45720" rIns="45720" tIns="27432" bIns="27432">
+            <a:spAutoFit/>
+          </a:bodyPr>
+          <a:lstStyle/>
+          <a:p>
+            <a:pPr algn="r"/>
+            <a:r>
+              <a:rPr sz="900" b="0" i="0">
+                <a:solidFill>
+                  <a:srgbClr val="7F7F7F"/>
+                </a:solidFill>
+                <a:latin typeface="Arial"/>
+              </a:rPr>
+              <a:t>2026-07-15</a:t>
+            </a:r>
+          </a:p>
+        </p:txBody>
+      </p:sp>
+      <p:sp>
+        <p:nvSpPr>
+          <p:cNvPr id="4" name="TextBox 3"/>
+          <p:cNvSpPr txBox="1"/>
+          <p:nvPr/>
+        </p:nvSpPr>
+        <p:spPr>
+          <a:xfrm>
             <a:off x="10817352" y="6217920"/>
             <a:ext cx="914400" cy="365760"/>
           </a:xfrm>
@@ -6320,7 +6530,7 @@
       </p:sp>
       <p:graphicFrame>
         <p:nvGraphicFramePr>
-          <p:cNvPr id="4" name="Table 3"/>
+          <p:cNvPr id="5" name="Table 4"/>
           <p:cNvGraphicFramePr>
             <a:graphicFrameLocks noGrp="1"/>
           </p:cNvGraphicFramePr>

--- a/examples/relatorio-financeiro.pptx
+++ b/examples/relatorio-financeiro.pptx
@@ -5539,7 +5539,7 @@
       </p:sp>
       <p:graphicFrame>
         <p:nvGraphicFramePr>
-          <p:cNvPr id="6" name="Chart 5"/>
+          <p:cNvPr id="6" name="Chart 5" descr="Ganho de custo compensou volume menor"/>
           <p:cNvGraphicFramePr>
             <a:graphicFrameLocks noGrp="1"/>
           </p:cNvGraphicFramePr>
